--- a/public/videos/repositories/disaster-spot-alert/disaster-spot-alert-tech-preview.pptx
+++ b/public/videos/repositories/disaster-spot-alert/disaster-spot-alert-tech-preview.pptx
@@ -134,7 +134,7 @@
           <p:cNvPr id="2" name="タイトル 1">
             <a:extLst>
               <a:ext uri="{FF2B5EF4-FFF2-40B4-BE49-F238E27FC236}">
-                <a16:creationId xmlns:a16="http://schemas.microsoft.com/office/drawing/2014/main" id="{4B03ED92-6F24-9571-CA46-B92E7356A96A}"/>
+                <a16:creationId xmlns:a16="http://schemas.microsoft.com/office/drawing/2014/main" id="{A0CA3864-5AD6-E06B-4A84-48562BFBB3DD}"/>
               </a:ext>
             </a:extLst>
           </p:cNvPr>
@@ -171,7 +171,7 @@
           <p:cNvPr id="3" name="字幕 2">
             <a:extLst>
               <a:ext uri="{FF2B5EF4-FFF2-40B4-BE49-F238E27FC236}">
-                <a16:creationId xmlns:a16="http://schemas.microsoft.com/office/drawing/2014/main" id="{29B8F910-4E3D-2747-C8D0-AC0B179C7274}"/>
+                <a16:creationId xmlns:a16="http://schemas.microsoft.com/office/drawing/2014/main" id="{1001EFF4-2B63-13C7-77F8-F8C142C9AA97}"/>
               </a:ext>
             </a:extLst>
           </p:cNvPr>
@@ -241,7 +241,7 @@
           <p:cNvPr id="4" name="日付プレースホルダー 3">
             <a:extLst>
               <a:ext uri="{FF2B5EF4-FFF2-40B4-BE49-F238E27FC236}">
-                <a16:creationId xmlns:a16="http://schemas.microsoft.com/office/drawing/2014/main" id="{C0B4F6C9-624C-8AD0-BE70-FD0AAB48FA6E}"/>
+                <a16:creationId xmlns:a16="http://schemas.microsoft.com/office/drawing/2014/main" id="{55B1A285-AACB-E2A3-69C9-11F032815D2C}"/>
               </a:ext>
             </a:extLst>
           </p:cNvPr>
@@ -257,7 +257,7 @@
           <a:bodyPr/>
           <a:lstStyle/>
           <a:p>
-            <a:fld id="{957BFF6D-8500-4101-BB44-2ABAE8972F8B}" type="datetimeFigureOut">
+            <a:fld id="{35AB557F-A6B7-4801-9173-6DB16EFAC0A8}" type="datetimeFigureOut">
               <a:rPr kumimoji="1" lang="ja-JP" altLang="en-US" smtClean="0"/>
               <a:t>2026/7/30</a:t>
             </a:fld>
@@ -270,7 +270,7 @@
           <p:cNvPr id="5" name="フッター プレースホルダー 4">
             <a:extLst>
               <a:ext uri="{FF2B5EF4-FFF2-40B4-BE49-F238E27FC236}">
-                <a16:creationId xmlns:a16="http://schemas.microsoft.com/office/drawing/2014/main" id="{E062B8CA-079C-62F5-1E01-7640BBBE7E48}"/>
+                <a16:creationId xmlns:a16="http://schemas.microsoft.com/office/drawing/2014/main" id="{8CDA4393-A0F3-7E2D-E783-DA409C694929}"/>
               </a:ext>
             </a:extLst>
           </p:cNvPr>
@@ -295,7 +295,7 @@
           <p:cNvPr id="6" name="スライド番号プレースホルダー 5">
             <a:extLst>
               <a:ext uri="{FF2B5EF4-FFF2-40B4-BE49-F238E27FC236}">
-                <a16:creationId xmlns:a16="http://schemas.microsoft.com/office/drawing/2014/main" id="{8C50437F-03D2-7A50-A3D0-BC2EE9F7960C}"/>
+                <a16:creationId xmlns:a16="http://schemas.microsoft.com/office/drawing/2014/main" id="{0192BAFB-EE58-F30C-2E39-6BF0289D2C80}"/>
               </a:ext>
             </a:extLst>
           </p:cNvPr>
@@ -311,7 +311,7 @@
           <a:bodyPr/>
           <a:lstStyle/>
           <a:p>
-            <a:fld id="{04854763-0B84-4190-A188-9CB2265BD69F}" type="slidenum">
+            <a:fld id="{0B07FF34-CFC8-4363-82BD-7F2DBF47CC3F}" type="slidenum">
               <a:rPr kumimoji="1" lang="ja-JP" altLang="en-US" smtClean="0"/>
               <a:t>‹#›</a:t>
             </a:fld>
@@ -322,7 +322,7 @@
     </p:spTree>
     <p:extLst>
       <p:ext uri="{BB962C8B-B14F-4D97-AF65-F5344CB8AC3E}">
-        <p14:creationId xmlns:p14="http://schemas.microsoft.com/office/powerpoint/2010/main" val="1333339664"/>
+        <p14:creationId xmlns:p14="http://schemas.microsoft.com/office/powerpoint/2010/main" val="411356368"/>
       </p:ext>
     </p:extLst>
   </p:cSld>
@@ -354,7 +354,7 @@
           <p:cNvPr id="2" name="タイトル 1">
             <a:extLst>
               <a:ext uri="{FF2B5EF4-FFF2-40B4-BE49-F238E27FC236}">
-                <a16:creationId xmlns:a16="http://schemas.microsoft.com/office/drawing/2014/main" id="{2BA8669D-C19B-9650-3395-F357AE2F2C04}"/>
+                <a16:creationId xmlns:a16="http://schemas.microsoft.com/office/drawing/2014/main" id="{20872340-BF54-30EE-683C-B96D70A4EFF4}"/>
               </a:ext>
             </a:extLst>
           </p:cNvPr>
@@ -382,7 +382,7 @@
           <p:cNvPr id="3" name="縦書きテキスト プレースホルダー 2">
             <a:extLst>
               <a:ext uri="{FF2B5EF4-FFF2-40B4-BE49-F238E27FC236}">
-                <a16:creationId xmlns:a16="http://schemas.microsoft.com/office/drawing/2014/main" id="{48E2E0F5-9430-2EE7-27A0-B359A319F214}"/>
+                <a16:creationId xmlns:a16="http://schemas.microsoft.com/office/drawing/2014/main" id="{0543FE24-9DB0-BD54-4589-86666BBA86C6}"/>
               </a:ext>
             </a:extLst>
           </p:cNvPr>
@@ -471,7 +471,7 @@
           <p:cNvPr id="4" name="日付プレースホルダー 3">
             <a:extLst>
               <a:ext uri="{FF2B5EF4-FFF2-40B4-BE49-F238E27FC236}">
-                <a16:creationId xmlns:a16="http://schemas.microsoft.com/office/drawing/2014/main" id="{4C4991DA-4366-8999-1709-29F21334341F}"/>
+                <a16:creationId xmlns:a16="http://schemas.microsoft.com/office/drawing/2014/main" id="{7B724E4D-4904-FD40-F8EA-A7259E27D1A9}"/>
               </a:ext>
             </a:extLst>
           </p:cNvPr>
@@ -487,7 +487,7 @@
           <a:bodyPr/>
           <a:lstStyle/>
           <a:p>
-            <a:fld id="{957BFF6D-8500-4101-BB44-2ABAE8972F8B}" type="datetimeFigureOut">
+            <a:fld id="{35AB557F-A6B7-4801-9173-6DB16EFAC0A8}" type="datetimeFigureOut">
               <a:rPr kumimoji="1" lang="ja-JP" altLang="en-US" smtClean="0"/>
               <a:t>2026/7/30</a:t>
             </a:fld>
@@ -500,7 +500,7 @@
           <p:cNvPr id="5" name="フッター プレースホルダー 4">
             <a:extLst>
               <a:ext uri="{FF2B5EF4-FFF2-40B4-BE49-F238E27FC236}">
-                <a16:creationId xmlns:a16="http://schemas.microsoft.com/office/drawing/2014/main" id="{11480878-CCC0-BC84-790E-B338E2555D59}"/>
+                <a16:creationId xmlns:a16="http://schemas.microsoft.com/office/drawing/2014/main" id="{31AD533C-61A5-F6D7-36DA-AF9797DF5227}"/>
               </a:ext>
             </a:extLst>
           </p:cNvPr>
@@ -525,7 +525,7 @@
           <p:cNvPr id="6" name="スライド番号プレースホルダー 5">
             <a:extLst>
               <a:ext uri="{FF2B5EF4-FFF2-40B4-BE49-F238E27FC236}">
-                <a16:creationId xmlns:a16="http://schemas.microsoft.com/office/drawing/2014/main" id="{985FC8B5-B597-00B0-57B9-B5F2CB0474D2}"/>
+                <a16:creationId xmlns:a16="http://schemas.microsoft.com/office/drawing/2014/main" id="{C9DD0791-F198-6A75-6F47-E866AC38E3AF}"/>
               </a:ext>
             </a:extLst>
           </p:cNvPr>
@@ -541,7 +541,7 @@
           <a:bodyPr/>
           <a:lstStyle/>
           <a:p>
-            <a:fld id="{04854763-0B84-4190-A188-9CB2265BD69F}" type="slidenum">
+            <a:fld id="{0B07FF34-CFC8-4363-82BD-7F2DBF47CC3F}" type="slidenum">
               <a:rPr kumimoji="1" lang="ja-JP" altLang="en-US" smtClean="0"/>
               <a:t>‹#›</a:t>
             </a:fld>
@@ -552,7 +552,7 @@
     </p:spTree>
     <p:extLst>
       <p:ext uri="{BB962C8B-B14F-4D97-AF65-F5344CB8AC3E}">
-        <p14:creationId xmlns:p14="http://schemas.microsoft.com/office/powerpoint/2010/main" val="1269737709"/>
+        <p14:creationId xmlns:p14="http://schemas.microsoft.com/office/powerpoint/2010/main" val="759042367"/>
       </p:ext>
     </p:extLst>
   </p:cSld>
@@ -584,7 +584,7 @@
           <p:cNvPr id="2" name="縦書きタイトル 1">
             <a:extLst>
               <a:ext uri="{FF2B5EF4-FFF2-40B4-BE49-F238E27FC236}">
-                <a16:creationId xmlns:a16="http://schemas.microsoft.com/office/drawing/2014/main" id="{7334FA38-F3F0-05B7-B7A0-E897C50A7252}"/>
+                <a16:creationId xmlns:a16="http://schemas.microsoft.com/office/drawing/2014/main" id="{35082FC0-B1CB-5E63-8A1E-CE6933B504A7}"/>
               </a:ext>
             </a:extLst>
           </p:cNvPr>
@@ -617,7 +617,7 @@
           <p:cNvPr id="3" name="縦書きテキスト プレースホルダー 2">
             <a:extLst>
               <a:ext uri="{FF2B5EF4-FFF2-40B4-BE49-F238E27FC236}">
-                <a16:creationId xmlns:a16="http://schemas.microsoft.com/office/drawing/2014/main" id="{B3D9BB43-02A9-7393-331D-27513A3B76BD}"/>
+                <a16:creationId xmlns:a16="http://schemas.microsoft.com/office/drawing/2014/main" id="{7D504681-D936-D92A-FCC5-B20564FCB792}"/>
               </a:ext>
             </a:extLst>
           </p:cNvPr>
@@ -711,7 +711,7 @@
           <p:cNvPr id="4" name="日付プレースホルダー 3">
             <a:extLst>
               <a:ext uri="{FF2B5EF4-FFF2-40B4-BE49-F238E27FC236}">
-                <a16:creationId xmlns:a16="http://schemas.microsoft.com/office/drawing/2014/main" id="{22B795E5-A5E1-B84C-B434-81C51B04A8F1}"/>
+                <a16:creationId xmlns:a16="http://schemas.microsoft.com/office/drawing/2014/main" id="{CFADBA3A-4688-24A5-0380-E2BFE2C77B55}"/>
               </a:ext>
             </a:extLst>
           </p:cNvPr>
@@ -727,7 +727,7 @@
           <a:bodyPr/>
           <a:lstStyle/>
           <a:p>
-            <a:fld id="{957BFF6D-8500-4101-BB44-2ABAE8972F8B}" type="datetimeFigureOut">
+            <a:fld id="{35AB557F-A6B7-4801-9173-6DB16EFAC0A8}" type="datetimeFigureOut">
               <a:rPr kumimoji="1" lang="ja-JP" altLang="en-US" smtClean="0"/>
               <a:t>2026/7/30</a:t>
             </a:fld>
@@ -740,7 +740,7 @@
           <p:cNvPr id="5" name="フッター プレースホルダー 4">
             <a:extLst>
               <a:ext uri="{FF2B5EF4-FFF2-40B4-BE49-F238E27FC236}">
-                <a16:creationId xmlns:a16="http://schemas.microsoft.com/office/drawing/2014/main" id="{0CBC73BD-CAC4-63BD-A4FF-AF5834AFFB8F}"/>
+                <a16:creationId xmlns:a16="http://schemas.microsoft.com/office/drawing/2014/main" id="{D1992823-CC52-10F4-ADAB-C33B82E5E2E4}"/>
               </a:ext>
             </a:extLst>
           </p:cNvPr>
@@ -765,7 +765,7 @@
           <p:cNvPr id="6" name="スライド番号プレースホルダー 5">
             <a:extLst>
               <a:ext uri="{FF2B5EF4-FFF2-40B4-BE49-F238E27FC236}">
-                <a16:creationId xmlns:a16="http://schemas.microsoft.com/office/drawing/2014/main" id="{3E13F5E8-C3F9-FF4D-341C-7133E52D95A7}"/>
+                <a16:creationId xmlns:a16="http://schemas.microsoft.com/office/drawing/2014/main" id="{BE6C5363-66E7-A596-026B-24E4B9ACE6FB}"/>
               </a:ext>
             </a:extLst>
           </p:cNvPr>
@@ -781,7 +781,7 @@
           <a:bodyPr/>
           <a:lstStyle/>
           <a:p>
-            <a:fld id="{04854763-0B84-4190-A188-9CB2265BD69F}" type="slidenum">
+            <a:fld id="{0B07FF34-CFC8-4363-82BD-7F2DBF47CC3F}" type="slidenum">
               <a:rPr kumimoji="1" lang="ja-JP" altLang="en-US" smtClean="0"/>
               <a:t>‹#›</a:t>
             </a:fld>
@@ -792,7 +792,7 @@
     </p:spTree>
     <p:extLst>
       <p:ext uri="{BB962C8B-B14F-4D97-AF65-F5344CB8AC3E}">
-        <p14:creationId xmlns:p14="http://schemas.microsoft.com/office/powerpoint/2010/main" val="129888347"/>
+        <p14:creationId xmlns:p14="http://schemas.microsoft.com/office/powerpoint/2010/main" val="703971757"/>
       </p:ext>
     </p:extLst>
   </p:cSld>
@@ -824,7 +824,7 @@
           <p:cNvPr id="2" name="タイトル 1">
             <a:extLst>
               <a:ext uri="{FF2B5EF4-FFF2-40B4-BE49-F238E27FC236}">
-                <a16:creationId xmlns:a16="http://schemas.microsoft.com/office/drawing/2014/main" id="{4930156C-A4CA-5608-F64E-986E7C2E7DD5}"/>
+                <a16:creationId xmlns:a16="http://schemas.microsoft.com/office/drawing/2014/main" id="{B3EAEF5C-E1D4-CCB6-A2C2-D04131027A8C}"/>
               </a:ext>
             </a:extLst>
           </p:cNvPr>
@@ -852,7 +852,7 @@
           <p:cNvPr id="3" name="コンテンツ プレースホルダー 2">
             <a:extLst>
               <a:ext uri="{FF2B5EF4-FFF2-40B4-BE49-F238E27FC236}">
-                <a16:creationId xmlns:a16="http://schemas.microsoft.com/office/drawing/2014/main" id="{7EF60D35-A481-2E19-BB4F-A19DAE21212E}"/>
+                <a16:creationId xmlns:a16="http://schemas.microsoft.com/office/drawing/2014/main" id="{ED7794CA-B2D7-DA8A-2F7F-84F8DD5767B9}"/>
               </a:ext>
             </a:extLst>
           </p:cNvPr>
@@ -941,7 +941,7 @@
           <p:cNvPr id="4" name="日付プレースホルダー 3">
             <a:extLst>
               <a:ext uri="{FF2B5EF4-FFF2-40B4-BE49-F238E27FC236}">
-                <a16:creationId xmlns:a16="http://schemas.microsoft.com/office/drawing/2014/main" id="{17759E9B-842C-4A06-1494-B872B831AC12}"/>
+                <a16:creationId xmlns:a16="http://schemas.microsoft.com/office/drawing/2014/main" id="{F45C7899-CF2C-6230-F8EF-D0151D91EB04}"/>
               </a:ext>
             </a:extLst>
           </p:cNvPr>
@@ -957,7 +957,7 @@
           <a:bodyPr/>
           <a:lstStyle/>
           <a:p>
-            <a:fld id="{957BFF6D-8500-4101-BB44-2ABAE8972F8B}" type="datetimeFigureOut">
+            <a:fld id="{35AB557F-A6B7-4801-9173-6DB16EFAC0A8}" type="datetimeFigureOut">
               <a:rPr kumimoji="1" lang="ja-JP" altLang="en-US" smtClean="0"/>
               <a:t>2026/7/30</a:t>
             </a:fld>
@@ -970,7 +970,7 @@
           <p:cNvPr id="5" name="フッター プレースホルダー 4">
             <a:extLst>
               <a:ext uri="{FF2B5EF4-FFF2-40B4-BE49-F238E27FC236}">
-                <a16:creationId xmlns:a16="http://schemas.microsoft.com/office/drawing/2014/main" id="{BF918A0D-B159-14E1-0FCA-8E79983D8BFE}"/>
+                <a16:creationId xmlns:a16="http://schemas.microsoft.com/office/drawing/2014/main" id="{6ABD6B57-F6AF-14CE-6543-201404B284CD}"/>
               </a:ext>
             </a:extLst>
           </p:cNvPr>
@@ -995,7 +995,7 @@
           <p:cNvPr id="6" name="スライド番号プレースホルダー 5">
             <a:extLst>
               <a:ext uri="{FF2B5EF4-FFF2-40B4-BE49-F238E27FC236}">
-                <a16:creationId xmlns:a16="http://schemas.microsoft.com/office/drawing/2014/main" id="{9EF3C852-2A87-76F4-06DC-8D635A4175CE}"/>
+                <a16:creationId xmlns:a16="http://schemas.microsoft.com/office/drawing/2014/main" id="{7D5870E3-7CF2-9C7C-AF60-D354F6BE83B2}"/>
               </a:ext>
             </a:extLst>
           </p:cNvPr>
@@ -1011,7 +1011,7 @@
           <a:bodyPr/>
           <a:lstStyle/>
           <a:p>
-            <a:fld id="{04854763-0B84-4190-A188-9CB2265BD69F}" type="slidenum">
+            <a:fld id="{0B07FF34-CFC8-4363-82BD-7F2DBF47CC3F}" type="slidenum">
               <a:rPr kumimoji="1" lang="ja-JP" altLang="en-US" smtClean="0"/>
               <a:t>‹#›</a:t>
             </a:fld>
@@ -1022,7 +1022,7 @@
     </p:spTree>
     <p:extLst>
       <p:ext uri="{BB962C8B-B14F-4D97-AF65-F5344CB8AC3E}">
-        <p14:creationId xmlns:p14="http://schemas.microsoft.com/office/powerpoint/2010/main" val="3515303640"/>
+        <p14:creationId xmlns:p14="http://schemas.microsoft.com/office/powerpoint/2010/main" val="464894441"/>
       </p:ext>
     </p:extLst>
   </p:cSld>
@@ -1054,7 +1054,7 @@
           <p:cNvPr id="2" name="タイトル 1">
             <a:extLst>
               <a:ext uri="{FF2B5EF4-FFF2-40B4-BE49-F238E27FC236}">
-                <a16:creationId xmlns:a16="http://schemas.microsoft.com/office/drawing/2014/main" id="{948432AA-B148-E795-5D00-65A5FF779DC8}"/>
+                <a16:creationId xmlns:a16="http://schemas.microsoft.com/office/drawing/2014/main" id="{CE5319C8-1AC6-5E5E-595E-D72FFED9F360}"/>
               </a:ext>
             </a:extLst>
           </p:cNvPr>
@@ -1091,7 +1091,7 @@
           <p:cNvPr id="3" name="テキスト プレースホルダー 2">
             <a:extLst>
               <a:ext uri="{FF2B5EF4-FFF2-40B4-BE49-F238E27FC236}">
-                <a16:creationId xmlns:a16="http://schemas.microsoft.com/office/drawing/2014/main" id="{494A0395-5C95-B940-19BD-F4574899F80B}"/>
+                <a16:creationId xmlns:a16="http://schemas.microsoft.com/office/drawing/2014/main" id="{AF053F16-D29E-39CD-043E-C32C267A7DE1}"/>
               </a:ext>
             </a:extLst>
           </p:cNvPr>
@@ -1216,7 +1216,7 @@
           <p:cNvPr id="4" name="日付プレースホルダー 3">
             <a:extLst>
               <a:ext uri="{FF2B5EF4-FFF2-40B4-BE49-F238E27FC236}">
-                <a16:creationId xmlns:a16="http://schemas.microsoft.com/office/drawing/2014/main" id="{CC053600-994C-F90D-CC14-8CF3B0C6B3E9}"/>
+                <a16:creationId xmlns:a16="http://schemas.microsoft.com/office/drawing/2014/main" id="{24760F34-AB8F-895D-D51B-D44100DEE151}"/>
               </a:ext>
             </a:extLst>
           </p:cNvPr>
@@ -1232,7 +1232,7 @@
           <a:bodyPr/>
           <a:lstStyle/>
           <a:p>
-            <a:fld id="{957BFF6D-8500-4101-BB44-2ABAE8972F8B}" type="datetimeFigureOut">
+            <a:fld id="{35AB557F-A6B7-4801-9173-6DB16EFAC0A8}" type="datetimeFigureOut">
               <a:rPr kumimoji="1" lang="ja-JP" altLang="en-US" smtClean="0"/>
               <a:t>2026/7/30</a:t>
             </a:fld>
@@ -1245,7 +1245,7 @@
           <p:cNvPr id="5" name="フッター プレースホルダー 4">
             <a:extLst>
               <a:ext uri="{FF2B5EF4-FFF2-40B4-BE49-F238E27FC236}">
-                <a16:creationId xmlns:a16="http://schemas.microsoft.com/office/drawing/2014/main" id="{44433E86-9D34-78F6-2FBE-696998302BC7}"/>
+                <a16:creationId xmlns:a16="http://schemas.microsoft.com/office/drawing/2014/main" id="{D4577897-2E7F-BA8C-D8D1-3A74588048D0}"/>
               </a:ext>
             </a:extLst>
           </p:cNvPr>
@@ -1270,7 +1270,7 @@
           <p:cNvPr id="6" name="スライド番号プレースホルダー 5">
             <a:extLst>
               <a:ext uri="{FF2B5EF4-FFF2-40B4-BE49-F238E27FC236}">
-                <a16:creationId xmlns:a16="http://schemas.microsoft.com/office/drawing/2014/main" id="{CC569D19-4F57-781B-196F-2E7A7867FF86}"/>
+                <a16:creationId xmlns:a16="http://schemas.microsoft.com/office/drawing/2014/main" id="{1EADCEA3-C5E5-F23A-D438-CAA840CBD360}"/>
               </a:ext>
             </a:extLst>
           </p:cNvPr>
@@ -1286,7 +1286,7 @@
           <a:bodyPr/>
           <a:lstStyle/>
           <a:p>
-            <a:fld id="{04854763-0B84-4190-A188-9CB2265BD69F}" type="slidenum">
+            <a:fld id="{0B07FF34-CFC8-4363-82BD-7F2DBF47CC3F}" type="slidenum">
               <a:rPr kumimoji="1" lang="ja-JP" altLang="en-US" smtClean="0"/>
               <a:t>‹#›</a:t>
             </a:fld>
@@ -1297,7 +1297,7 @@
     </p:spTree>
     <p:extLst>
       <p:ext uri="{BB962C8B-B14F-4D97-AF65-F5344CB8AC3E}">
-        <p14:creationId xmlns:p14="http://schemas.microsoft.com/office/powerpoint/2010/main" val="337409342"/>
+        <p14:creationId xmlns:p14="http://schemas.microsoft.com/office/powerpoint/2010/main" val="2356810385"/>
       </p:ext>
     </p:extLst>
   </p:cSld>
@@ -1329,7 +1329,7 @@
           <p:cNvPr id="2" name="タイトル 1">
             <a:extLst>
               <a:ext uri="{FF2B5EF4-FFF2-40B4-BE49-F238E27FC236}">
-                <a16:creationId xmlns:a16="http://schemas.microsoft.com/office/drawing/2014/main" id="{C7841F4C-4B1B-4636-37C8-9FF364CB92FC}"/>
+                <a16:creationId xmlns:a16="http://schemas.microsoft.com/office/drawing/2014/main" id="{C629AD5B-FCE1-BE67-BD42-28EA1E5AB955}"/>
               </a:ext>
             </a:extLst>
           </p:cNvPr>
@@ -1357,7 +1357,7 @@
           <p:cNvPr id="3" name="コンテンツ プレースホルダー 2">
             <a:extLst>
               <a:ext uri="{FF2B5EF4-FFF2-40B4-BE49-F238E27FC236}">
-                <a16:creationId xmlns:a16="http://schemas.microsoft.com/office/drawing/2014/main" id="{36F148FA-AF40-16A7-C683-8DA961A58AB0}"/>
+                <a16:creationId xmlns:a16="http://schemas.microsoft.com/office/drawing/2014/main" id="{5F5D408A-E0F1-B620-ED2E-2173EF845ACC}"/>
               </a:ext>
             </a:extLst>
           </p:cNvPr>
@@ -1451,7 +1451,7 @@
           <p:cNvPr id="4" name="コンテンツ プレースホルダー 3">
             <a:extLst>
               <a:ext uri="{FF2B5EF4-FFF2-40B4-BE49-F238E27FC236}">
-                <a16:creationId xmlns:a16="http://schemas.microsoft.com/office/drawing/2014/main" id="{92E7E5E3-B1F7-8147-58FD-20253D90173A}"/>
+                <a16:creationId xmlns:a16="http://schemas.microsoft.com/office/drawing/2014/main" id="{5AF06342-A4FF-8513-A42A-08DCBE68754E}"/>
               </a:ext>
             </a:extLst>
           </p:cNvPr>
@@ -1545,7 +1545,7 @@
           <p:cNvPr id="5" name="日付プレースホルダー 4">
             <a:extLst>
               <a:ext uri="{FF2B5EF4-FFF2-40B4-BE49-F238E27FC236}">
-                <a16:creationId xmlns:a16="http://schemas.microsoft.com/office/drawing/2014/main" id="{F9DF710A-C40D-7282-3557-756B859F7991}"/>
+                <a16:creationId xmlns:a16="http://schemas.microsoft.com/office/drawing/2014/main" id="{15F5B88E-605F-95FE-BF74-F80DA3127C9D}"/>
               </a:ext>
             </a:extLst>
           </p:cNvPr>
@@ -1561,7 +1561,7 @@
           <a:bodyPr/>
           <a:lstStyle/>
           <a:p>
-            <a:fld id="{957BFF6D-8500-4101-BB44-2ABAE8972F8B}" type="datetimeFigureOut">
+            <a:fld id="{35AB557F-A6B7-4801-9173-6DB16EFAC0A8}" type="datetimeFigureOut">
               <a:rPr kumimoji="1" lang="ja-JP" altLang="en-US" smtClean="0"/>
               <a:t>2026/7/30</a:t>
             </a:fld>
@@ -1574,7 +1574,7 @@
           <p:cNvPr id="6" name="フッター プレースホルダー 5">
             <a:extLst>
               <a:ext uri="{FF2B5EF4-FFF2-40B4-BE49-F238E27FC236}">
-                <a16:creationId xmlns:a16="http://schemas.microsoft.com/office/drawing/2014/main" id="{777DB1D1-024F-9CD2-AE81-D3A99E366CCD}"/>
+                <a16:creationId xmlns:a16="http://schemas.microsoft.com/office/drawing/2014/main" id="{63A7C09E-B8FC-97DA-9E6C-BCD5FD601E85}"/>
               </a:ext>
             </a:extLst>
           </p:cNvPr>
@@ -1599,7 +1599,7 @@
           <p:cNvPr id="7" name="スライド番号プレースホルダー 6">
             <a:extLst>
               <a:ext uri="{FF2B5EF4-FFF2-40B4-BE49-F238E27FC236}">
-                <a16:creationId xmlns:a16="http://schemas.microsoft.com/office/drawing/2014/main" id="{1FF8242F-BC02-4B66-517F-0DBB59F11E7E}"/>
+                <a16:creationId xmlns:a16="http://schemas.microsoft.com/office/drawing/2014/main" id="{7FBE8F8C-B595-13CC-D278-7DFFD76E3632}"/>
               </a:ext>
             </a:extLst>
           </p:cNvPr>
@@ -1615,7 +1615,7 @@
           <a:bodyPr/>
           <a:lstStyle/>
           <a:p>
-            <a:fld id="{04854763-0B84-4190-A188-9CB2265BD69F}" type="slidenum">
+            <a:fld id="{0B07FF34-CFC8-4363-82BD-7F2DBF47CC3F}" type="slidenum">
               <a:rPr kumimoji="1" lang="ja-JP" altLang="en-US" smtClean="0"/>
               <a:t>‹#›</a:t>
             </a:fld>
@@ -1626,7 +1626,7 @@
     </p:spTree>
     <p:extLst>
       <p:ext uri="{BB962C8B-B14F-4D97-AF65-F5344CB8AC3E}">
-        <p14:creationId xmlns:p14="http://schemas.microsoft.com/office/powerpoint/2010/main" val="3065827352"/>
+        <p14:creationId xmlns:p14="http://schemas.microsoft.com/office/powerpoint/2010/main" val="1029762323"/>
       </p:ext>
     </p:extLst>
   </p:cSld>
@@ -1658,7 +1658,7 @@
           <p:cNvPr id="2" name="タイトル 1">
             <a:extLst>
               <a:ext uri="{FF2B5EF4-FFF2-40B4-BE49-F238E27FC236}">
-                <a16:creationId xmlns:a16="http://schemas.microsoft.com/office/drawing/2014/main" id="{672B076C-B844-C06D-63AD-88E204334CD7}"/>
+                <a16:creationId xmlns:a16="http://schemas.microsoft.com/office/drawing/2014/main" id="{98AF0DBB-8BFB-203F-7EDE-CFBC05E20D22}"/>
               </a:ext>
             </a:extLst>
           </p:cNvPr>
@@ -1691,7 +1691,7 @@
           <p:cNvPr id="3" name="テキスト プレースホルダー 2">
             <a:extLst>
               <a:ext uri="{FF2B5EF4-FFF2-40B4-BE49-F238E27FC236}">
-                <a16:creationId xmlns:a16="http://schemas.microsoft.com/office/drawing/2014/main" id="{61D65973-BC72-2633-946D-96F0ABA46CFC}"/>
+                <a16:creationId xmlns:a16="http://schemas.microsoft.com/office/drawing/2014/main" id="{15B9EB96-25D0-F30E-8EB2-3FD1661B9281}"/>
               </a:ext>
             </a:extLst>
           </p:cNvPr>
@@ -1762,7 +1762,7 @@
           <p:cNvPr id="4" name="コンテンツ プレースホルダー 3">
             <a:extLst>
               <a:ext uri="{FF2B5EF4-FFF2-40B4-BE49-F238E27FC236}">
-                <a16:creationId xmlns:a16="http://schemas.microsoft.com/office/drawing/2014/main" id="{DA5816F4-DB4A-F9F4-398A-E21F0D223F67}"/>
+                <a16:creationId xmlns:a16="http://schemas.microsoft.com/office/drawing/2014/main" id="{FD4F80E3-31D4-3D0B-BAEA-C5A6CEC31D46}"/>
               </a:ext>
             </a:extLst>
           </p:cNvPr>
@@ -1856,7 +1856,7 @@
           <p:cNvPr id="5" name="テキスト プレースホルダー 4">
             <a:extLst>
               <a:ext uri="{FF2B5EF4-FFF2-40B4-BE49-F238E27FC236}">
-                <a16:creationId xmlns:a16="http://schemas.microsoft.com/office/drawing/2014/main" id="{98CFD1F6-6C5F-546F-C391-0D534945ACAE}"/>
+                <a16:creationId xmlns:a16="http://schemas.microsoft.com/office/drawing/2014/main" id="{90C457E3-FA2E-4485-6DED-AD36C26CF1BB}"/>
               </a:ext>
             </a:extLst>
           </p:cNvPr>
@@ -1927,7 +1927,7 @@
           <p:cNvPr id="6" name="コンテンツ プレースホルダー 5">
             <a:extLst>
               <a:ext uri="{FF2B5EF4-FFF2-40B4-BE49-F238E27FC236}">
-                <a16:creationId xmlns:a16="http://schemas.microsoft.com/office/drawing/2014/main" id="{CE653CED-5E4E-0571-EA0E-2FD1D9A326E7}"/>
+                <a16:creationId xmlns:a16="http://schemas.microsoft.com/office/drawing/2014/main" id="{9E89EE0A-D6E1-F0BC-8886-0025B63743B9}"/>
               </a:ext>
             </a:extLst>
           </p:cNvPr>
@@ -2021,7 +2021,7 @@
           <p:cNvPr id="7" name="日付プレースホルダー 6">
             <a:extLst>
               <a:ext uri="{FF2B5EF4-FFF2-40B4-BE49-F238E27FC236}">
-                <a16:creationId xmlns:a16="http://schemas.microsoft.com/office/drawing/2014/main" id="{DF2320BB-780D-F465-0303-C50A2D7A6BCE}"/>
+                <a16:creationId xmlns:a16="http://schemas.microsoft.com/office/drawing/2014/main" id="{D4CE9054-9687-304E-E1E8-BE0493A7C998}"/>
               </a:ext>
             </a:extLst>
           </p:cNvPr>
@@ -2037,7 +2037,7 @@
           <a:bodyPr/>
           <a:lstStyle/>
           <a:p>
-            <a:fld id="{957BFF6D-8500-4101-BB44-2ABAE8972F8B}" type="datetimeFigureOut">
+            <a:fld id="{35AB557F-A6B7-4801-9173-6DB16EFAC0A8}" type="datetimeFigureOut">
               <a:rPr kumimoji="1" lang="ja-JP" altLang="en-US" smtClean="0"/>
               <a:t>2026/7/30</a:t>
             </a:fld>
@@ -2050,7 +2050,7 @@
           <p:cNvPr id="8" name="フッター プレースホルダー 7">
             <a:extLst>
               <a:ext uri="{FF2B5EF4-FFF2-40B4-BE49-F238E27FC236}">
-                <a16:creationId xmlns:a16="http://schemas.microsoft.com/office/drawing/2014/main" id="{48CB379B-5455-E994-33CA-6598FC9EAE6C}"/>
+                <a16:creationId xmlns:a16="http://schemas.microsoft.com/office/drawing/2014/main" id="{CF423C41-07CE-D93B-FE1F-807D43163F34}"/>
               </a:ext>
             </a:extLst>
           </p:cNvPr>
@@ -2075,7 +2075,7 @@
           <p:cNvPr id="9" name="スライド番号プレースホルダー 8">
             <a:extLst>
               <a:ext uri="{FF2B5EF4-FFF2-40B4-BE49-F238E27FC236}">
-                <a16:creationId xmlns:a16="http://schemas.microsoft.com/office/drawing/2014/main" id="{F8DB5109-846A-7381-C2A4-38223C1088E5}"/>
+                <a16:creationId xmlns:a16="http://schemas.microsoft.com/office/drawing/2014/main" id="{69F9D819-304C-6E76-496F-5BEFBA628C83}"/>
               </a:ext>
             </a:extLst>
           </p:cNvPr>
@@ -2091,7 +2091,7 @@
           <a:bodyPr/>
           <a:lstStyle/>
           <a:p>
-            <a:fld id="{04854763-0B84-4190-A188-9CB2265BD69F}" type="slidenum">
+            <a:fld id="{0B07FF34-CFC8-4363-82BD-7F2DBF47CC3F}" type="slidenum">
               <a:rPr kumimoji="1" lang="ja-JP" altLang="en-US" smtClean="0"/>
               <a:t>‹#›</a:t>
             </a:fld>
@@ -2102,7 +2102,7 @@
     </p:spTree>
     <p:extLst>
       <p:ext uri="{BB962C8B-B14F-4D97-AF65-F5344CB8AC3E}">
-        <p14:creationId xmlns:p14="http://schemas.microsoft.com/office/powerpoint/2010/main" val="2475011644"/>
+        <p14:creationId xmlns:p14="http://schemas.microsoft.com/office/powerpoint/2010/main" val="3754194441"/>
       </p:ext>
     </p:extLst>
   </p:cSld>
@@ -2134,7 +2134,7 @@
           <p:cNvPr id="2" name="タイトル 1">
             <a:extLst>
               <a:ext uri="{FF2B5EF4-FFF2-40B4-BE49-F238E27FC236}">
-                <a16:creationId xmlns:a16="http://schemas.microsoft.com/office/drawing/2014/main" id="{4C22D8DC-E8E8-63AD-1686-EA40CBC3B0F7}"/>
+                <a16:creationId xmlns:a16="http://schemas.microsoft.com/office/drawing/2014/main" id="{5FED5066-8227-3418-FC82-26A976E36FC5}"/>
               </a:ext>
             </a:extLst>
           </p:cNvPr>
@@ -2162,7 +2162,7 @@
           <p:cNvPr id="3" name="日付プレースホルダー 2">
             <a:extLst>
               <a:ext uri="{FF2B5EF4-FFF2-40B4-BE49-F238E27FC236}">
-                <a16:creationId xmlns:a16="http://schemas.microsoft.com/office/drawing/2014/main" id="{D58FA90B-78EA-C082-8257-D513B9E54B64}"/>
+                <a16:creationId xmlns:a16="http://schemas.microsoft.com/office/drawing/2014/main" id="{16C16A42-BB75-76CE-412B-3F094ECE9A0B}"/>
               </a:ext>
             </a:extLst>
           </p:cNvPr>
@@ -2178,7 +2178,7 @@
           <a:bodyPr/>
           <a:lstStyle/>
           <a:p>
-            <a:fld id="{957BFF6D-8500-4101-BB44-2ABAE8972F8B}" type="datetimeFigureOut">
+            <a:fld id="{35AB557F-A6B7-4801-9173-6DB16EFAC0A8}" type="datetimeFigureOut">
               <a:rPr kumimoji="1" lang="ja-JP" altLang="en-US" smtClean="0"/>
               <a:t>2026/7/30</a:t>
             </a:fld>
@@ -2191,7 +2191,7 @@
           <p:cNvPr id="4" name="フッター プレースホルダー 3">
             <a:extLst>
               <a:ext uri="{FF2B5EF4-FFF2-40B4-BE49-F238E27FC236}">
-                <a16:creationId xmlns:a16="http://schemas.microsoft.com/office/drawing/2014/main" id="{D0C0B607-4F00-F926-2FD2-D9D3CEEAA0C8}"/>
+                <a16:creationId xmlns:a16="http://schemas.microsoft.com/office/drawing/2014/main" id="{418C54C6-1D98-8A2E-B28F-744CD4E45C48}"/>
               </a:ext>
             </a:extLst>
           </p:cNvPr>
@@ -2216,7 +2216,7 @@
           <p:cNvPr id="5" name="スライド番号プレースホルダー 4">
             <a:extLst>
               <a:ext uri="{FF2B5EF4-FFF2-40B4-BE49-F238E27FC236}">
-                <a16:creationId xmlns:a16="http://schemas.microsoft.com/office/drawing/2014/main" id="{BBC7894F-71B4-7D1A-62F8-C929CCE25735}"/>
+                <a16:creationId xmlns:a16="http://schemas.microsoft.com/office/drawing/2014/main" id="{9164FDAE-4F1C-7E6E-B122-D61E89D8C2AD}"/>
               </a:ext>
             </a:extLst>
           </p:cNvPr>
@@ -2232,7 +2232,7 @@
           <a:bodyPr/>
           <a:lstStyle/>
           <a:p>
-            <a:fld id="{04854763-0B84-4190-A188-9CB2265BD69F}" type="slidenum">
+            <a:fld id="{0B07FF34-CFC8-4363-82BD-7F2DBF47CC3F}" type="slidenum">
               <a:rPr kumimoji="1" lang="ja-JP" altLang="en-US" smtClean="0"/>
               <a:t>‹#›</a:t>
             </a:fld>
@@ -2243,7 +2243,7 @@
     </p:spTree>
     <p:extLst>
       <p:ext uri="{BB962C8B-B14F-4D97-AF65-F5344CB8AC3E}">
-        <p14:creationId xmlns:p14="http://schemas.microsoft.com/office/powerpoint/2010/main" val="3872204097"/>
+        <p14:creationId xmlns:p14="http://schemas.microsoft.com/office/powerpoint/2010/main" val="505930127"/>
       </p:ext>
     </p:extLst>
   </p:cSld>
@@ -2275,7 +2275,7 @@
           <p:cNvPr id="2" name="日付プレースホルダー 1">
             <a:extLst>
               <a:ext uri="{FF2B5EF4-FFF2-40B4-BE49-F238E27FC236}">
-                <a16:creationId xmlns:a16="http://schemas.microsoft.com/office/drawing/2014/main" id="{8A5F20D0-C3C7-6AAD-A2D9-77640B8B49E5}"/>
+                <a16:creationId xmlns:a16="http://schemas.microsoft.com/office/drawing/2014/main" id="{1C4A9808-5F05-556E-2573-B90FEEA3BC48}"/>
               </a:ext>
             </a:extLst>
           </p:cNvPr>
@@ -2291,7 +2291,7 @@
           <a:bodyPr/>
           <a:lstStyle/>
           <a:p>
-            <a:fld id="{957BFF6D-8500-4101-BB44-2ABAE8972F8B}" type="datetimeFigureOut">
+            <a:fld id="{35AB557F-A6B7-4801-9173-6DB16EFAC0A8}" type="datetimeFigureOut">
               <a:rPr kumimoji="1" lang="ja-JP" altLang="en-US" smtClean="0"/>
               <a:t>2026/7/30</a:t>
             </a:fld>
@@ -2304,7 +2304,7 @@
           <p:cNvPr id="3" name="フッター プレースホルダー 2">
             <a:extLst>
               <a:ext uri="{FF2B5EF4-FFF2-40B4-BE49-F238E27FC236}">
-                <a16:creationId xmlns:a16="http://schemas.microsoft.com/office/drawing/2014/main" id="{6F972290-5E27-D6DA-CB64-7A8330A26CF7}"/>
+                <a16:creationId xmlns:a16="http://schemas.microsoft.com/office/drawing/2014/main" id="{5D43EFBD-2F60-8482-C4C0-41ED5E864FE6}"/>
               </a:ext>
             </a:extLst>
           </p:cNvPr>
@@ -2329,7 +2329,7 @@
           <p:cNvPr id="4" name="スライド番号プレースホルダー 3">
             <a:extLst>
               <a:ext uri="{FF2B5EF4-FFF2-40B4-BE49-F238E27FC236}">
-                <a16:creationId xmlns:a16="http://schemas.microsoft.com/office/drawing/2014/main" id="{4AE9804C-719A-BAFB-1D32-30CDF7306B07}"/>
+                <a16:creationId xmlns:a16="http://schemas.microsoft.com/office/drawing/2014/main" id="{31B97B00-4BB6-3DDF-5976-7596B6DC9448}"/>
               </a:ext>
             </a:extLst>
           </p:cNvPr>
@@ -2345,7 +2345,7 @@
           <a:bodyPr/>
           <a:lstStyle/>
           <a:p>
-            <a:fld id="{04854763-0B84-4190-A188-9CB2265BD69F}" type="slidenum">
+            <a:fld id="{0B07FF34-CFC8-4363-82BD-7F2DBF47CC3F}" type="slidenum">
               <a:rPr kumimoji="1" lang="ja-JP" altLang="en-US" smtClean="0"/>
               <a:t>‹#›</a:t>
             </a:fld>
@@ -2356,7 +2356,7 @@
     </p:spTree>
     <p:extLst>
       <p:ext uri="{BB962C8B-B14F-4D97-AF65-F5344CB8AC3E}">
-        <p14:creationId xmlns:p14="http://schemas.microsoft.com/office/powerpoint/2010/main" val="4246733260"/>
+        <p14:creationId xmlns:p14="http://schemas.microsoft.com/office/powerpoint/2010/main" val="4292680383"/>
       </p:ext>
     </p:extLst>
   </p:cSld>
@@ -2388,7 +2388,7 @@
           <p:cNvPr id="2" name="タイトル 1">
             <a:extLst>
               <a:ext uri="{FF2B5EF4-FFF2-40B4-BE49-F238E27FC236}">
-                <a16:creationId xmlns:a16="http://schemas.microsoft.com/office/drawing/2014/main" id="{7F4ED637-529F-39AA-936C-A0D9025352A9}"/>
+                <a16:creationId xmlns:a16="http://schemas.microsoft.com/office/drawing/2014/main" id="{78C67C98-43D0-DDBB-D67B-0A3E53127AEB}"/>
               </a:ext>
             </a:extLst>
           </p:cNvPr>
@@ -2425,7 +2425,7 @@
           <p:cNvPr id="3" name="コンテンツ プレースホルダー 2">
             <a:extLst>
               <a:ext uri="{FF2B5EF4-FFF2-40B4-BE49-F238E27FC236}">
-                <a16:creationId xmlns:a16="http://schemas.microsoft.com/office/drawing/2014/main" id="{65D16655-F05B-6D1E-7078-00D66A2A123F}"/>
+                <a16:creationId xmlns:a16="http://schemas.microsoft.com/office/drawing/2014/main" id="{BF50F49B-3D2A-A8DD-852E-BE5810CD8579}"/>
               </a:ext>
             </a:extLst>
           </p:cNvPr>
@@ -2547,7 +2547,7 @@
           <p:cNvPr id="4" name="テキスト プレースホルダー 3">
             <a:extLst>
               <a:ext uri="{FF2B5EF4-FFF2-40B4-BE49-F238E27FC236}">
-                <a16:creationId xmlns:a16="http://schemas.microsoft.com/office/drawing/2014/main" id="{D902851F-D0BE-76D8-16F3-04CD41D5D3FC}"/>
+                <a16:creationId xmlns:a16="http://schemas.microsoft.com/office/drawing/2014/main" id="{94738D99-90EB-1E3C-37E2-BD063EF5C12C}"/>
               </a:ext>
             </a:extLst>
           </p:cNvPr>
@@ -2618,7 +2618,7 @@
           <p:cNvPr id="5" name="日付プレースホルダー 4">
             <a:extLst>
               <a:ext uri="{FF2B5EF4-FFF2-40B4-BE49-F238E27FC236}">
-                <a16:creationId xmlns:a16="http://schemas.microsoft.com/office/drawing/2014/main" id="{13B20B09-8194-5D8E-6366-58BC7799145F}"/>
+                <a16:creationId xmlns:a16="http://schemas.microsoft.com/office/drawing/2014/main" id="{2553C6E9-A056-5BD8-B824-F858C48BD637}"/>
               </a:ext>
             </a:extLst>
           </p:cNvPr>
@@ -2634,7 +2634,7 @@
           <a:bodyPr/>
           <a:lstStyle/>
           <a:p>
-            <a:fld id="{957BFF6D-8500-4101-BB44-2ABAE8972F8B}" type="datetimeFigureOut">
+            <a:fld id="{35AB557F-A6B7-4801-9173-6DB16EFAC0A8}" type="datetimeFigureOut">
               <a:rPr kumimoji="1" lang="ja-JP" altLang="en-US" smtClean="0"/>
               <a:t>2026/7/30</a:t>
             </a:fld>
@@ -2647,7 +2647,7 @@
           <p:cNvPr id="6" name="フッター プレースホルダー 5">
             <a:extLst>
               <a:ext uri="{FF2B5EF4-FFF2-40B4-BE49-F238E27FC236}">
-                <a16:creationId xmlns:a16="http://schemas.microsoft.com/office/drawing/2014/main" id="{0170C582-1707-188A-93CE-00AB59B57B98}"/>
+                <a16:creationId xmlns:a16="http://schemas.microsoft.com/office/drawing/2014/main" id="{F0FBE809-5738-E662-8604-F07789013F0B}"/>
               </a:ext>
             </a:extLst>
           </p:cNvPr>
@@ -2672,7 +2672,7 @@
           <p:cNvPr id="7" name="スライド番号プレースホルダー 6">
             <a:extLst>
               <a:ext uri="{FF2B5EF4-FFF2-40B4-BE49-F238E27FC236}">
-                <a16:creationId xmlns:a16="http://schemas.microsoft.com/office/drawing/2014/main" id="{3F423A22-67EE-511A-CD7B-5B276418604B}"/>
+                <a16:creationId xmlns:a16="http://schemas.microsoft.com/office/drawing/2014/main" id="{CB9B4FCC-9A37-8995-49FE-6E4D5228AA15}"/>
               </a:ext>
             </a:extLst>
           </p:cNvPr>
@@ -2688,7 +2688,7 @@
           <a:bodyPr/>
           <a:lstStyle/>
           <a:p>
-            <a:fld id="{04854763-0B84-4190-A188-9CB2265BD69F}" type="slidenum">
+            <a:fld id="{0B07FF34-CFC8-4363-82BD-7F2DBF47CC3F}" type="slidenum">
               <a:rPr kumimoji="1" lang="ja-JP" altLang="en-US" smtClean="0"/>
               <a:t>‹#›</a:t>
             </a:fld>
@@ -2699,7 +2699,7 @@
     </p:spTree>
     <p:extLst>
       <p:ext uri="{BB962C8B-B14F-4D97-AF65-F5344CB8AC3E}">
-        <p14:creationId xmlns:p14="http://schemas.microsoft.com/office/powerpoint/2010/main" val="824536740"/>
+        <p14:creationId xmlns:p14="http://schemas.microsoft.com/office/powerpoint/2010/main" val="1397759150"/>
       </p:ext>
     </p:extLst>
   </p:cSld>
@@ -2731,7 +2731,7 @@
           <p:cNvPr id="2" name="タイトル 1">
             <a:extLst>
               <a:ext uri="{FF2B5EF4-FFF2-40B4-BE49-F238E27FC236}">
-                <a16:creationId xmlns:a16="http://schemas.microsoft.com/office/drawing/2014/main" id="{FC433F73-AF4C-B9EA-123F-69A675BF1FE8}"/>
+                <a16:creationId xmlns:a16="http://schemas.microsoft.com/office/drawing/2014/main" id="{7727C881-CEF8-6375-4580-E1CFCF099452}"/>
               </a:ext>
             </a:extLst>
           </p:cNvPr>
@@ -2768,7 +2768,7 @@
           <p:cNvPr id="3" name="図プレースホルダー 2">
             <a:extLst>
               <a:ext uri="{FF2B5EF4-FFF2-40B4-BE49-F238E27FC236}">
-                <a16:creationId xmlns:a16="http://schemas.microsoft.com/office/drawing/2014/main" id="{26F8974C-436B-02BE-C008-5539243E47F8}"/>
+                <a16:creationId xmlns:a16="http://schemas.microsoft.com/office/drawing/2014/main" id="{718252EE-3D33-BBC8-7548-32CBB3201FB0}"/>
               </a:ext>
             </a:extLst>
           </p:cNvPr>
@@ -2835,7 +2835,7 @@
           <p:cNvPr id="4" name="テキスト プレースホルダー 3">
             <a:extLst>
               <a:ext uri="{FF2B5EF4-FFF2-40B4-BE49-F238E27FC236}">
-                <a16:creationId xmlns:a16="http://schemas.microsoft.com/office/drawing/2014/main" id="{A0416464-25E7-F58E-F59D-96D05C96C69C}"/>
+                <a16:creationId xmlns:a16="http://schemas.microsoft.com/office/drawing/2014/main" id="{8FAA85FD-D39B-81AE-B43F-95989E7692D7}"/>
               </a:ext>
             </a:extLst>
           </p:cNvPr>
@@ -2906,7 +2906,7 @@
           <p:cNvPr id="5" name="日付プレースホルダー 4">
             <a:extLst>
               <a:ext uri="{FF2B5EF4-FFF2-40B4-BE49-F238E27FC236}">
-                <a16:creationId xmlns:a16="http://schemas.microsoft.com/office/drawing/2014/main" id="{0BDCEE9B-D299-7DF7-7F12-3AE83B9CEC57}"/>
+                <a16:creationId xmlns:a16="http://schemas.microsoft.com/office/drawing/2014/main" id="{05B82504-B011-703A-7FBA-56965A6DD90E}"/>
               </a:ext>
             </a:extLst>
           </p:cNvPr>
@@ -2922,7 +2922,7 @@
           <a:bodyPr/>
           <a:lstStyle/>
           <a:p>
-            <a:fld id="{957BFF6D-8500-4101-BB44-2ABAE8972F8B}" type="datetimeFigureOut">
+            <a:fld id="{35AB557F-A6B7-4801-9173-6DB16EFAC0A8}" type="datetimeFigureOut">
               <a:rPr kumimoji="1" lang="ja-JP" altLang="en-US" smtClean="0"/>
               <a:t>2026/7/30</a:t>
             </a:fld>
@@ -2935,7 +2935,7 @@
           <p:cNvPr id="6" name="フッター プレースホルダー 5">
             <a:extLst>
               <a:ext uri="{FF2B5EF4-FFF2-40B4-BE49-F238E27FC236}">
-                <a16:creationId xmlns:a16="http://schemas.microsoft.com/office/drawing/2014/main" id="{B59FA410-CF53-A005-45AE-84BAD1B2C0DE}"/>
+                <a16:creationId xmlns:a16="http://schemas.microsoft.com/office/drawing/2014/main" id="{B317F527-E55B-C6D5-4ED9-5B1407C71ADF}"/>
               </a:ext>
             </a:extLst>
           </p:cNvPr>
@@ -2960,7 +2960,7 @@
           <p:cNvPr id="7" name="スライド番号プレースホルダー 6">
             <a:extLst>
               <a:ext uri="{FF2B5EF4-FFF2-40B4-BE49-F238E27FC236}">
-                <a16:creationId xmlns:a16="http://schemas.microsoft.com/office/drawing/2014/main" id="{AE861AC9-936B-BE7C-9D49-5EEB3034A940}"/>
+                <a16:creationId xmlns:a16="http://schemas.microsoft.com/office/drawing/2014/main" id="{B2A37C28-D55D-5BC4-595E-8F83BFB84C21}"/>
               </a:ext>
             </a:extLst>
           </p:cNvPr>
@@ -2976,7 +2976,7 @@
           <a:bodyPr/>
           <a:lstStyle/>
           <a:p>
-            <a:fld id="{04854763-0B84-4190-A188-9CB2265BD69F}" type="slidenum">
+            <a:fld id="{0B07FF34-CFC8-4363-82BD-7F2DBF47CC3F}" type="slidenum">
               <a:rPr kumimoji="1" lang="ja-JP" altLang="en-US" smtClean="0"/>
               <a:t>‹#›</a:t>
             </a:fld>
@@ -2987,7 +2987,7 @@
     </p:spTree>
     <p:extLst>
       <p:ext uri="{BB962C8B-B14F-4D97-AF65-F5344CB8AC3E}">
-        <p14:creationId xmlns:p14="http://schemas.microsoft.com/office/powerpoint/2010/main" val="3152066444"/>
+        <p14:creationId xmlns:p14="http://schemas.microsoft.com/office/powerpoint/2010/main" val="608182189"/>
       </p:ext>
     </p:extLst>
   </p:cSld>
@@ -3024,7 +3024,7 @@
           <p:cNvPr id="2" name="タイトル プレースホルダー 1">
             <a:extLst>
               <a:ext uri="{FF2B5EF4-FFF2-40B4-BE49-F238E27FC236}">
-                <a16:creationId xmlns:a16="http://schemas.microsoft.com/office/drawing/2014/main" id="{26EAB626-57C8-EEBE-292E-3E61B26A0F8D}"/>
+                <a16:creationId xmlns:a16="http://schemas.microsoft.com/office/drawing/2014/main" id="{A5D9D1E0-C509-7A8D-6AA1-E9788A249EF5}"/>
               </a:ext>
             </a:extLst>
           </p:cNvPr>
@@ -3062,7 +3062,7 @@
           <p:cNvPr id="3" name="テキスト プレースホルダー 2">
             <a:extLst>
               <a:ext uri="{FF2B5EF4-FFF2-40B4-BE49-F238E27FC236}">
-                <a16:creationId xmlns:a16="http://schemas.microsoft.com/office/drawing/2014/main" id="{AB424042-4EAE-4942-4DB5-DF4F5E0CEAB7}"/>
+                <a16:creationId xmlns:a16="http://schemas.microsoft.com/office/drawing/2014/main" id="{8C1D3B1A-8615-FC9C-884D-1759A00952D4}"/>
               </a:ext>
             </a:extLst>
           </p:cNvPr>
@@ -3161,7 +3161,7 @@
           <p:cNvPr id="4" name="日付プレースホルダー 3">
             <a:extLst>
               <a:ext uri="{FF2B5EF4-FFF2-40B4-BE49-F238E27FC236}">
-                <a16:creationId xmlns:a16="http://schemas.microsoft.com/office/drawing/2014/main" id="{DC1E4369-0E05-FF83-3990-84CACFF5537C}"/>
+                <a16:creationId xmlns:a16="http://schemas.microsoft.com/office/drawing/2014/main" id="{8E108FA3-786A-1EDF-F26B-4754B6A9AA56}"/>
               </a:ext>
             </a:extLst>
           </p:cNvPr>
@@ -3195,7 +3195,7 @@
             </a:lvl1pPr>
           </a:lstStyle>
           <a:p>
-            <a:fld id="{957BFF6D-8500-4101-BB44-2ABAE8972F8B}" type="datetimeFigureOut">
+            <a:fld id="{35AB557F-A6B7-4801-9173-6DB16EFAC0A8}" type="datetimeFigureOut">
               <a:rPr kumimoji="1" lang="ja-JP" altLang="en-US" smtClean="0"/>
               <a:t>2026/7/30</a:t>
             </a:fld>
@@ -3208,7 +3208,7 @@
           <p:cNvPr id="5" name="フッター プレースホルダー 4">
             <a:extLst>
               <a:ext uri="{FF2B5EF4-FFF2-40B4-BE49-F238E27FC236}">
-                <a16:creationId xmlns:a16="http://schemas.microsoft.com/office/drawing/2014/main" id="{85440AAD-3466-56EE-B4BA-2C8E4E67F3B3}"/>
+                <a16:creationId xmlns:a16="http://schemas.microsoft.com/office/drawing/2014/main" id="{E9045115-F09C-F92A-D96B-5E2CA4B87689}"/>
               </a:ext>
             </a:extLst>
           </p:cNvPr>
@@ -3251,7 +3251,7 @@
           <p:cNvPr id="6" name="スライド番号プレースホルダー 5">
             <a:extLst>
               <a:ext uri="{FF2B5EF4-FFF2-40B4-BE49-F238E27FC236}">
-                <a16:creationId xmlns:a16="http://schemas.microsoft.com/office/drawing/2014/main" id="{8A3DACA5-5393-BE37-C992-BE8F225C5E07}"/>
+                <a16:creationId xmlns:a16="http://schemas.microsoft.com/office/drawing/2014/main" id="{F1489D26-DE7E-6933-F539-79B1F1BC1BBF}"/>
               </a:ext>
             </a:extLst>
           </p:cNvPr>
@@ -3285,7 +3285,7 @@
             </a:lvl1pPr>
           </a:lstStyle>
           <a:p>
-            <a:fld id="{04854763-0B84-4190-A188-9CB2265BD69F}" type="slidenum">
+            <a:fld id="{0B07FF34-CFC8-4363-82BD-7F2DBF47CC3F}" type="slidenum">
               <a:rPr kumimoji="1" lang="ja-JP" altLang="en-US" smtClean="0"/>
               <a:t>‹#›</a:t>
             </a:fld>
@@ -3296,7 +3296,7 @@
     </p:spTree>
     <p:extLst>
       <p:ext uri="{BB962C8B-B14F-4D97-AF65-F5344CB8AC3E}">
-        <p14:creationId xmlns:p14="http://schemas.microsoft.com/office/powerpoint/2010/main" val="4026677363"/>
+        <p14:creationId xmlns:p14="http://schemas.microsoft.com/office/powerpoint/2010/main" val="952905867"/>
       </p:ext>
     </p:extLst>
   </p:cSld>
@@ -3619,7 +3619,7 @@
           <p:cNvPr id="2" name="テキスト ボックス 1">
             <a:extLst>
               <a:ext uri="{FF2B5EF4-FFF2-40B4-BE49-F238E27FC236}">
-                <a16:creationId xmlns:a16="http://schemas.microsoft.com/office/drawing/2014/main" id="{BF3D2DCC-5930-229D-80B9-66A3E6233CF4}"/>
+                <a16:creationId xmlns:a16="http://schemas.microsoft.com/office/drawing/2014/main" id="{2BC12415-4B25-1125-C07B-1FAE6A46E748}"/>
               </a:ext>
             </a:extLst>
           </p:cNvPr>
@@ -3665,7 +3665,7 @@
           <p:cNvPr id="3" name="テキスト ボックス 2">
             <a:extLst>
               <a:ext uri="{FF2B5EF4-FFF2-40B4-BE49-F238E27FC236}">
-                <a16:creationId xmlns:a16="http://schemas.microsoft.com/office/drawing/2014/main" id="{FA1812A2-6E17-D205-A706-D5C4604F9808}"/>
+                <a16:creationId xmlns:a16="http://schemas.microsoft.com/office/drawing/2014/main" id="{C572E7E5-1E3B-8542-4389-B123CEDAC880}"/>
               </a:ext>
             </a:extLst>
           </p:cNvPr>
@@ -3714,7 +3714,7 @@
           <p:cNvPr id="4" name="テキスト ボックス 3">
             <a:extLst>
               <a:ext uri="{FF2B5EF4-FFF2-40B4-BE49-F238E27FC236}">
-                <a16:creationId xmlns:a16="http://schemas.microsoft.com/office/drawing/2014/main" id="{4ABA2EF7-559E-BEFC-6077-A7FDA939F961}"/>
+                <a16:creationId xmlns:a16="http://schemas.microsoft.com/office/drawing/2014/main" id="{825F0565-44E0-AED2-BEDA-AC4550D48699}"/>
               </a:ext>
             </a:extLst>
           </p:cNvPr>
@@ -3754,7 +3754,7 @@
           <p:cNvPr id="5" name="テキスト ボックス 4">
             <a:extLst>
               <a:ext uri="{FF2B5EF4-FFF2-40B4-BE49-F238E27FC236}">
-                <a16:creationId xmlns:a16="http://schemas.microsoft.com/office/drawing/2014/main" id="{9257FA80-8971-AAE9-653A-FD81F5D06DDD}"/>
+                <a16:creationId xmlns:a16="http://schemas.microsoft.com/office/drawing/2014/main" id="{C7A39017-3DA1-C0C9-904E-318A084E1696}"/>
               </a:ext>
             </a:extLst>
           </p:cNvPr>
@@ -3801,7 +3801,7 @@
             <a:hlinkClick r:id="" action="ppaction://media"/>
             <a:extLst>
               <a:ext uri="{FF2B5EF4-FFF2-40B4-BE49-F238E27FC236}">
-                <a16:creationId xmlns:a16="http://schemas.microsoft.com/office/drawing/2014/main" id="{278F4152-DE52-A57A-3AA7-9B367C4CC810}"/>
+                <a16:creationId xmlns:a16="http://schemas.microsoft.com/office/drawing/2014/main" id="{95B7A3F8-B48D-DB94-B73D-B1AAF62CC0F9}"/>
               </a:ext>
             </a:extLst>
           </p:cNvPr>
@@ -3836,7 +3836,7 @@
     </p:spTree>
     <p:extLst>
       <p:ext uri="{BB962C8B-B14F-4D97-AF65-F5344CB8AC3E}">
-        <p14:creationId xmlns:p14="http://schemas.microsoft.com/office/powerpoint/2010/main" val="203041595"/>
+        <p14:creationId xmlns:p14="http://schemas.microsoft.com/office/powerpoint/2010/main" val="3993754892"/>
       </p:ext>
     </p:extLst>
   </p:cSld>
@@ -3960,7 +3960,7 @@
           <p:cNvPr id="2" name="テキスト ボックス 1">
             <a:extLst>
               <a:ext uri="{FF2B5EF4-FFF2-40B4-BE49-F238E27FC236}">
-                <a16:creationId xmlns:a16="http://schemas.microsoft.com/office/drawing/2014/main" id="{0D56B126-1E0A-B8E3-C012-2541F3EC5EFC}"/>
+                <a16:creationId xmlns:a16="http://schemas.microsoft.com/office/drawing/2014/main" id="{6E6E977D-8A80-488D-7214-64C0E51F6642}"/>
               </a:ext>
             </a:extLst>
           </p:cNvPr>
@@ -4006,7 +4006,7 @@
           <p:cNvPr id="3" name="テキスト ボックス 2">
             <a:extLst>
               <a:ext uri="{FF2B5EF4-FFF2-40B4-BE49-F238E27FC236}">
-                <a16:creationId xmlns:a16="http://schemas.microsoft.com/office/drawing/2014/main" id="{BF1C3221-2879-D31F-3295-77EE38AF4C9D}"/>
+                <a16:creationId xmlns:a16="http://schemas.microsoft.com/office/drawing/2014/main" id="{4BEDE351-9303-329F-D20F-8FC4C532523A}"/>
               </a:ext>
             </a:extLst>
           </p:cNvPr>
@@ -4046,7 +4046,7 @@
           <p:cNvPr id="4" name="テキスト ボックス 3">
             <a:extLst>
               <a:ext uri="{FF2B5EF4-FFF2-40B4-BE49-F238E27FC236}">
-                <a16:creationId xmlns:a16="http://schemas.microsoft.com/office/drawing/2014/main" id="{8ADC6E6B-A9B1-96AD-D937-A87EBA6CFB72}"/>
+                <a16:creationId xmlns:a16="http://schemas.microsoft.com/office/drawing/2014/main" id="{A0DE60C3-6046-789D-8443-DF0FB87027BF}"/>
               </a:ext>
             </a:extLst>
           </p:cNvPr>
@@ -4128,7 +4128,7 @@
           <p:cNvPr id="5" name="テキスト ボックス 4">
             <a:extLst>
               <a:ext uri="{FF2B5EF4-FFF2-40B4-BE49-F238E27FC236}">
-                <a16:creationId xmlns:a16="http://schemas.microsoft.com/office/drawing/2014/main" id="{C302B36B-3343-C84A-4BF8-6204ADB03B91}"/>
+                <a16:creationId xmlns:a16="http://schemas.microsoft.com/office/drawing/2014/main" id="{D16F23F9-041F-5A00-5535-FEEC86BD0A58}"/>
               </a:ext>
             </a:extLst>
           </p:cNvPr>
@@ -4175,7 +4175,7 @@
             <a:hlinkClick r:id="" action="ppaction://media"/>
             <a:extLst>
               <a:ext uri="{FF2B5EF4-FFF2-40B4-BE49-F238E27FC236}">
-                <a16:creationId xmlns:a16="http://schemas.microsoft.com/office/drawing/2014/main" id="{27ED57FB-7688-DF7F-5497-C267D8C8FF46}"/>
+                <a16:creationId xmlns:a16="http://schemas.microsoft.com/office/drawing/2014/main" id="{2CDF7E9E-090A-EEC6-A864-9634C574CDD7}"/>
               </a:ext>
             </a:extLst>
           </p:cNvPr>
@@ -4210,7 +4210,7 @@
     </p:spTree>
     <p:extLst>
       <p:ext uri="{BB962C8B-B14F-4D97-AF65-F5344CB8AC3E}">
-        <p14:creationId xmlns:p14="http://schemas.microsoft.com/office/powerpoint/2010/main" val="2586481990"/>
+        <p14:creationId xmlns:p14="http://schemas.microsoft.com/office/powerpoint/2010/main" val="11590125"/>
       </p:ext>
     </p:extLst>
   </p:cSld>
@@ -4334,7 +4334,7 @@
           <p:cNvPr id="2" name="テキスト ボックス 1">
             <a:extLst>
               <a:ext uri="{FF2B5EF4-FFF2-40B4-BE49-F238E27FC236}">
-                <a16:creationId xmlns:a16="http://schemas.microsoft.com/office/drawing/2014/main" id="{3F9BAF24-FB8B-E429-0FA0-7F0B29DC9E1C}"/>
+                <a16:creationId xmlns:a16="http://schemas.microsoft.com/office/drawing/2014/main" id="{F20478E2-5A14-5ED8-DF86-4AF88107A7D7}"/>
               </a:ext>
             </a:extLst>
           </p:cNvPr>
@@ -4380,7 +4380,7 @@
           <p:cNvPr id="3" name="テキスト ボックス 2">
             <a:extLst>
               <a:ext uri="{FF2B5EF4-FFF2-40B4-BE49-F238E27FC236}">
-                <a16:creationId xmlns:a16="http://schemas.microsoft.com/office/drawing/2014/main" id="{6E989024-6955-6B02-90F9-E87D34394EE0}"/>
+                <a16:creationId xmlns:a16="http://schemas.microsoft.com/office/drawing/2014/main" id="{A93BB24F-5FE0-EB0F-50DE-77C1BA2FE685}"/>
               </a:ext>
             </a:extLst>
           </p:cNvPr>
@@ -4420,7 +4420,7 @@
           <p:cNvPr id="4" name="テキスト ボックス 3">
             <a:extLst>
               <a:ext uri="{FF2B5EF4-FFF2-40B4-BE49-F238E27FC236}">
-                <a16:creationId xmlns:a16="http://schemas.microsoft.com/office/drawing/2014/main" id="{B22BB1B6-6C53-4702-6C8A-B3CA2D348CC1}"/>
+                <a16:creationId xmlns:a16="http://schemas.microsoft.com/office/drawing/2014/main" id="{F02D0500-70BA-0BCF-2DFF-ED5456F33623}"/>
               </a:ext>
             </a:extLst>
           </p:cNvPr>
@@ -4515,7 +4515,7 @@
           <p:cNvPr id="5" name="テキスト ボックス 4">
             <a:extLst>
               <a:ext uri="{FF2B5EF4-FFF2-40B4-BE49-F238E27FC236}">
-                <a16:creationId xmlns:a16="http://schemas.microsoft.com/office/drawing/2014/main" id="{2EF00947-8DCA-305E-3AEE-132FBB00A19C}"/>
+                <a16:creationId xmlns:a16="http://schemas.microsoft.com/office/drawing/2014/main" id="{B71B9186-F3DE-A604-859D-A0B9059F84F4}"/>
               </a:ext>
             </a:extLst>
           </p:cNvPr>
@@ -4562,7 +4562,7 @@
             <a:hlinkClick r:id="" action="ppaction://media"/>
             <a:extLst>
               <a:ext uri="{FF2B5EF4-FFF2-40B4-BE49-F238E27FC236}">
-                <a16:creationId xmlns:a16="http://schemas.microsoft.com/office/drawing/2014/main" id="{741484ED-AEE2-FBF7-3C69-070C80680CE5}"/>
+                <a16:creationId xmlns:a16="http://schemas.microsoft.com/office/drawing/2014/main" id="{88F0354D-9F57-1040-6C7B-E4ED74E30732}"/>
               </a:ext>
             </a:extLst>
           </p:cNvPr>
@@ -4597,7 +4597,7 @@
     </p:spTree>
     <p:extLst>
       <p:ext uri="{BB962C8B-B14F-4D97-AF65-F5344CB8AC3E}">
-        <p14:creationId xmlns:p14="http://schemas.microsoft.com/office/powerpoint/2010/main" val="1284295351"/>
+        <p14:creationId xmlns:p14="http://schemas.microsoft.com/office/powerpoint/2010/main" val="1370172236"/>
       </p:ext>
     </p:extLst>
   </p:cSld>
@@ -4721,7 +4721,7 @@
           <p:cNvPr id="2" name="テキスト ボックス 1">
             <a:extLst>
               <a:ext uri="{FF2B5EF4-FFF2-40B4-BE49-F238E27FC236}">
-                <a16:creationId xmlns:a16="http://schemas.microsoft.com/office/drawing/2014/main" id="{D62CF5B3-AF5F-7D9E-DDA2-B1A03D18B24E}"/>
+                <a16:creationId xmlns:a16="http://schemas.microsoft.com/office/drawing/2014/main" id="{A9A01A2A-155A-4B1A-7912-4865565B4216}"/>
               </a:ext>
             </a:extLst>
           </p:cNvPr>
@@ -4767,7 +4767,7 @@
           <p:cNvPr id="3" name="テキスト ボックス 2">
             <a:extLst>
               <a:ext uri="{FF2B5EF4-FFF2-40B4-BE49-F238E27FC236}">
-                <a16:creationId xmlns:a16="http://schemas.microsoft.com/office/drawing/2014/main" id="{7AD62617-6D76-E0E9-BA15-089D1B342F0A}"/>
+                <a16:creationId xmlns:a16="http://schemas.microsoft.com/office/drawing/2014/main" id="{5CF8A371-6070-12DB-01DC-44DDF2EB704A}"/>
               </a:ext>
             </a:extLst>
           </p:cNvPr>
@@ -4807,7 +4807,7 @@
           <p:cNvPr id="4" name="テキスト ボックス 3">
             <a:extLst>
               <a:ext uri="{FF2B5EF4-FFF2-40B4-BE49-F238E27FC236}">
-                <a16:creationId xmlns:a16="http://schemas.microsoft.com/office/drawing/2014/main" id="{434E63C0-9C22-B861-1A6C-503D4785864F}"/>
+                <a16:creationId xmlns:a16="http://schemas.microsoft.com/office/drawing/2014/main" id="{BC219065-D73D-1428-884B-FA7A259207CA}"/>
               </a:ext>
             </a:extLst>
           </p:cNvPr>
@@ -4917,7 +4917,7 @@
           <p:cNvPr id="5" name="テキスト ボックス 4">
             <a:extLst>
               <a:ext uri="{FF2B5EF4-FFF2-40B4-BE49-F238E27FC236}">
-                <a16:creationId xmlns:a16="http://schemas.microsoft.com/office/drawing/2014/main" id="{BAB0D7F9-8B98-C642-2705-76082422C495}"/>
+                <a16:creationId xmlns:a16="http://schemas.microsoft.com/office/drawing/2014/main" id="{3DE7235E-2626-DF1C-C5C9-309FF7B1FC0D}"/>
               </a:ext>
             </a:extLst>
           </p:cNvPr>
@@ -4964,7 +4964,7 @@
             <a:hlinkClick r:id="" action="ppaction://media"/>
             <a:extLst>
               <a:ext uri="{FF2B5EF4-FFF2-40B4-BE49-F238E27FC236}">
-                <a16:creationId xmlns:a16="http://schemas.microsoft.com/office/drawing/2014/main" id="{FD497DBD-0B5F-F722-4E14-464F3C2BB9C0}"/>
+                <a16:creationId xmlns:a16="http://schemas.microsoft.com/office/drawing/2014/main" id="{2F816EF5-614E-C116-7079-5A769138E2A1}"/>
               </a:ext>
             </a:extLst>
           </p:cNvPr>
@@ -4999,7 +4999,7 @@
     </p:spTree>
     <p:extLst>
       <p:ext uri="{BB962C8B-B14F-4D97-AF65-F5344CB8AC3E}">
-        <p14:creationId xmlns:p14="http://schemas.microsoft.com/office/powerpoint/2010/main" val="1844681334"/>
+        <p14:creationId xmlns:p14="http://schemas.microsoft.com/office/powerpoint/2010/main" val="2411851333"/>
       </p:ext>
     </p:extLst>
   </p:cSld>
@@ -5123,7 +5123,7 @@
           <p:cNvPr id="2" name="テキスト ボックス 1">
             <a:extLst>
               <a:ext uri="{FF2B5EF4-FFF2-40B4-BE49-F238E27FC236}">
-                <a16:creationId xmlns:a16="http://schemas.microsoft.com/office/drawing/2014/main" id="{0E881E84-C353-A4A6-8D74-7B8F893CE887}"/>
+                <a16:creationId xmlns:a16="http://schemas.microsoft.com/office/drawing/2014/main" id="{0767DA86-71E8-36C5-11B8-7F8043783DAB}"/>
               </a:ext>
             </a:extLst>
           </p:cNvPr>
@@ -5169,7 +5169,7 @@
           <p:cNvPr id="3" name="テキスト ボックス 2">
             <a:extLst>
               <a:ext uri="{FF2B5EF4-FFF2-40B4-BE49-F238E27FC236}">
-                <a16:creationId xmlns:a16="http://schemas.microsoft.com/office/drawing/2014/main" id="{62BF6A0C-92CF-D804-3544-A6337298386E}"/>
+                <a16:creationId xmlns:a16="http://schemas.microsoft.com/office/drawing/2014/main" id="{51CE5B52-AFD5-5F3F-4637-B5F0AF7784A1}"/>
               </a:ext>
             </a:extLst>
           </p:cNvPr>
@@ -5209,7 +5209,7 @@
           <p:cNvPr id="4" name="テキスト ボックス 3">
             <a:extLst>
               <a:ext uri="{FF2B5EF4-FFF2-40B4-BE49-F238E27FC236}">
-                <a16:creationId xmlns:a16="http://schemas.microsoft.com/office/drawing/2014/main" id="{E859CB4D-A7B9-F7DD-E2B9-FB029532E4FF}"/>
+                <a16:creationId xmlns:a16="http://schemas.microsoft.com/office/drawing/2014/main" id="{C83BF184-B417-02C7-2441-4130F279E08E}"/>
               </a:ext>
             </a:extLst>
           </p:cNvPr>
@@ -5233,20 +5233,14 @@
           <a:lstStyle/>
           <a:p>
             <a:r>
-              <a:rPr kumimoji="1" lang="en-US" altLang="ja-JP" sz="2000">
+              <a:rPr kumimoji="1" lang="ja-JP" altLang="en-US" sz="2000">
                 <a:solidFill>
                   <a:srgbClr val="333333"/>
                 </a:solidFill>
                 <a:latin typeface="Arial" panose="020B0604020202020204" pitchFamily="34" charset="0"/>
               </a:rPr>
-              <a:t>Set confirmed custom domain</a:t>
-            </a:r>
-            <a:endParaRPr kumimoji="1" lang="ja-JP" altLang="en-US" sz="2000">
-              <a:solidFill>
-                <a:srgbClr val="333333"/>
-              </a:solidFill>
-              <a:latin typeface="Arial" panose="020B0604020202020204" pitchFamily="34" charset="0"/>
-            </a:endParaRPr>
+              <a:t>直近のコミットでは、実装の見直しと継続的な改善が行われました。</a:t>
+            </a:r>
           </a:p>
         </p:txBody>
       </p:sp>
@@ -5255,7 +5249,7 @@
           <p:cNvPr id="5" name="テキスト ボックス 4">
             <a:extLst>
               <a:ext uri="{FF2B5EF4-FFF2-40B4-BE49-F238E27FC236}">
-                <a16:creationId xmlns:a16="http://schemas.microsoft.com/office/drawing/2014/main" id="{8BFF437F-F8A2-9CCB-1334-D7F261597092}"/>
+                <a16:creationId xmlns:a16="http://schemas.microsoft.com/office/drawing/2014/main" id="{4E75D6F2-48DC-607B-74CC-4C00892BD213}"/>
               </a:ext>
             </a:extLst>
           </p:cNvPr>
@@ -5302,7 +5296,7 @@
             <a:hlinkClick r:id="" action="ppaction://media"/>
             <a:extLst>
               <a:ext uri="{FF2B5EF4-FFF2-40B4-BE49-F238E27FC236}">
-                <a16:creationId xmlns:a16="http://schemas.microsoft.com/office/drawing/2014/main" id="{E8753EF7-F7C3-F85C-0308-D571D28C50D0}"/>
+                <a16:creationId xmlns:a16="http://schemas.microsoft.com/office/drawing/2014/main" id="{DE37A6D0-CCE6-4D87-FFC0-16A8001A7050}"/>
               </a:ext>
             </a:extLst>
           </p:cNvPr>
@@ -5337,7 +5331,7 @@
     </p:spTree>
     <p:extLst>
       <p:ext uri="{BB962C8B-B14F-4D97-AF65-F5344CB8AC3E}">
-        <p14:creationId xmlns:p14="http://schemas.microsoft.com/office/powerpoint/2010/main" val="547219562"/>
+        <p14:creationId xmlns:p14="http://schemas.microsoft.com/office/powerpoint/2010/main" val="2677314068"/>
       </p:ext>
     </p:extLst>
   </p:cSld>
@@ -5380,7 +5374,7 @@
                                   <p:childTnLst>
                                     <p:cmd type="call" cmd="playFrom(0.0)">
                                       <p:cBhvr>
-                                        <p:cTn id="6" dur="6451" fill="hold"/>
+                                        <p:cTn id="6" dur="6076" fill="hold"/>
                                         <p:tgtEl>
                                           <p:spTgt spid="6"/>
                                         </p:tgtEl>
@@ -5461,7 +5455,7 @@
           <p:cNvPr id="2" name="テキスト ボックス 1">
             <a:extLst>
               <a:ext uri="{FF2B5EF4-FFF2-40B4-BE49-F238E27FC236}">
-                <a16:creationId xmlns:a16="http://schemas.microsoft.com/office/drawing/2014/main" id="{099B675F-2B9D-9C02-B5B9-B874F4FEA449}"/>
+                <a16:creationId xmlns:a16="http://schemas.microsoft.com/office/drawing/2014/main" id="{1778005D-AE2A-D5F4-6DC4-B95D97CCA509}"/>
               </a:ext>
             </a:extLst>
           </p:cNvPr>
@@ -5507,7 +5501,7 @@
           <p:cNvPr id="3" name="テキスト ボックス 2">
             <a:extLst>
               <a:ext uri="{FF2B5EF4-FFF2-40B4-BE49-F238E27FC236}">
-                <a16:creationId xmlns:a16="http://schemas.microsoft.com/office/drawing/2014/main" id="{34035FCE-3331-8E34-8699-7B203C5A116A}"/>
+                <a16:creationId xmlns:a16="http://schemas.microsoft.com/office/drawing/2014/main" id="{3ECFEE9F-CE5D-C20F-A682-22C640D36739}"/>
               </a:ext>
             </a:extLst>
           </p:cNvPr>
@@ -5547,7 +5541,7 @@
           <p:cNvPr id="4" name="テキスト ボックス 3">
             <a:extLst>
               <a:ext uri="{FF2B5EF4-FFF2-40B4-BE49-F238E27FC236}">
-                <a16:creationId xmlns:a16="http://schemas.microsoft.com/office/drawing/2014/main" id="{96EC7DBA-D688-E910-D5BF-2C2B6C842D06}"/>
+                <a16:creationId xmlns:a16="http://schemas.microsoft.com/office/drawing/2014/main" id="{FEC9F323-9CF4-2597-4847-D8B9B6F37348}"/>
               </a:ext>
             </a:extLst>
           </p:cNvPr>
@@ -5612,7 +5606,7 @@
           <p:cNvPr id="5" name="テキスト ボックス 4">
             <a:extLst>
               <a:ext uri="{FF2B5EF4-FFF2-40B4-BE49-F238E27FC236}">
-                <a16:creationId xmlns:a16="http://schemas.microsoft.com/office/drawing/2014/main" id="{2C99E4D5-C734-5F00-B279-DF2F91A9CA33}"/>
+                <a16:creationId xmlns:a16="http://schemas.microsoft.com/office/drawing/2014/main" id="{B80DA7DF-0780-5023-32A8-D98DFE933DE7}"/>
               </a:ext>
             </a:extLst>
           </p:cNvPr>
@@ -5659,7 +5653,7 @@
             <a:hlinkClick r:id="" action="ppaction://media"/>
             <a:extLst>
               <a:ext uri="{FF2B5EF4-FFF2-40B4-BE49-F238E27FC236}">
-                <a16:creationId xmlns:a16="http://schemas.microsoft.com/office/drawing/2014/main" id="{82568B5D-8CC7-F0D8-5BF6-6E73AFE9614D}"/>
+                <a16:creationId xmlns:a16="http://schemas.microsoft.com/office/drawing/2014/main" id="{27AAF210-A2AC-A514-6151-F533E832B223}"/>
               </a:ext>
             </a:extLst>
           </p:cNvPr>
@@ -5694,7 +5688,7 @@
     </p:spTree>
     <p:extLst>
       <p:ext uri="{BB962C8B-B14F-4D97-AF65-F5344CB8AC3E}">
-        <p14:creationId xmlns:p14="http://schemas.microsoft.com/office/powerpoint/2010/main" val="3153973388"/>
+        <p14:creationId xmlns:p14="http://schemas.microsoft.com/office/powerpoint/2010/main" val="634328608"/>
       </p:ext>
     </p:extLst>
   </p:cSld>
